--- a/set/2026-07-05 El Camino Baptist Church.pptx
+++ b/set/2026-07-05 El Camino Baptist Church.pptx
@@ -52,14 +52,15 @@
     <p:sldId id="319" r:id="rId46"/>
     <p:sldId id="320" r:id="rId47"/>
     <p:sldId id="321" r:id="rId48"/>
-    <p:sldId id="322" r:id="rId49"/>
-    <p:sldId id="323" r:id="rId50"/>
-    <p:sldId id="279" r:id="rId51"/>
-    <p:sldId id="324" r:id="rId52"/>
-    <p:sldId id="325" r:id="rId53"/>
-    <p:sldId id="326" r:id="rId54"/>
-    <p:sldId id="327" r:id="rId55"/>
-    <p:sldId id="328" r:id="rId56"/>
+    <p:sldId id="329" r:id="rId49"/>
+    <p:sldId id="322" r:id="rId50"/>
+    <p:sldId id="323" r:id="rId51"/>
+    <p:sldId id="279" r:id="rId52"/>
+    <p:sldId id="324" r:id="rId53"/>
+    <p:sldId id="325" r:id="rId54"/>
+    <p:sldId id="326" r:id="rId55"/>
+    <p:sldId id="327" r:id="rId56"/>
+    <p:sldId id="328" r:id="rId57"/>
   </p:sldIdLst>
   <p:sldSz cx="9144000" cy="6858000" type="screen4x3"/>
   <p:notesSz cx="6858000" cy="9144000"/>
@@ -8446,48 +8447,6 @@
           <a:chExt cx="0" cy="0"/>
         </a:xfrm>
       </p:grpSpPr>
-      <p:sp>
-        <p:nvSpPr>
-          <p:cNvPr id="3" name="Subtitle 2">
-            <a:extLst>
-              <a:ext uri="{FF2B5EF4-FFF2-40B4-BE49-F238E27FC236}">
-                <a16:creationId xmlns:a16="http://schemas.microsoft.com/office/drawing/2014/main" id="{C25DBF04-8174-1226-1E95-AC7FB0F1B0E0}"/>
-              </a:ext>
-            </a:extLst>
-          </p:cNvPr>
-          <p:cNvSpPr>
-            <a:spLocks noGrp="1"/>
-          </p:cNvSpPr>
-          <p:nvPr>
-            <p:ph type="subTitle" idx="1"/>
-          </p:nvPr>
-        </p:nvSpPr>
-        <p:spPr>
-          <a:xfrm>
-            <a:off x="84221" y="213360"/>
-            <a:ext cx="8891337" cy="6416040"/>
-          </a:xfrm>
-        </p:spPr>
-        <p:txBody>
-          <a:bodyPr>
-            <a:noAutofit/>
-          </a:bodyPr>
-          <a:lstStyle/>
-          <a:p>
-            <a:pPr algn="l"/>
-            <a:r>
-              <a:rPr lang="en-US" sz="6600" dirty="0">
-                <a:solidFill>
-                  <a:schemeClr val="bg1"/>
-                </a:solidFill>
-                <a:latin typeface="Avenir Medium" panose="02000503020000020003" pitchFamily="2" charset="0"/>
-                <a:ea typeface="Bodoni Ornaments" pitchFamily="2" charset="0"/>
-              </a:rPr>
-              <a:t>Amazing Grace</a:t>
-            </a:r>
-          </a:p>
-        </p:txBody>
-      </p:sp>
     </p:spTree>
     <p:extLst>
       <p:ext uri="{BB962C8B-B14F-4D97-AF65-F5344CB8AC3E}">
@@ -8502,6 +8461,92 @@
 </file>
 
 <file path=ppt/slides/slide48.xml><?xml version="1.0" encoding="utf-8"?>
+<p:sld xmlns:a="http://schemas.openxmlformats.org/drawingml/2006/main" xmlns:r="http://schemas.openxmlformats.org/officeDocument/2006/relationships" xmlns:p="http://schemas.openxmlformats.org/presentationml/2006/main">
+  <p:cSld>
+    <p:bg>
+      <p:bgPr>
+        <a:solidFill>
+          <a:schemeClr val="tx1"/>
+        </a:solidFill>
+        <a:effectLst/>
+      </p:bgPr>
+    </p:bg>
+    <p:spTree>
+      <p:nvGrpSpPr>
+        <p:cNvPr id="1" name="">
+          <a:extLst>
+            <a:ext uri="{FF2B5EF4-FFF2-40B4-BE49-F238E27FC236}">
+              <a16:creationId xmlns:a16="http://schemas.microsoft.com/office/drawing/2014/main" id="{1A587304-454A-E131-D439-1EE320FABE91}"/>
+            </a:ext>
+          </a:extLst>
+        </p:cNvPr>
+        <p:cNvGrpSpPr/>
+        <p:nvPr/>
+      </p:nvGrpSpPr>
+      <p:grpSpPr>
+        <a:xfrm>
+          <a:off x="0" y="0"/>
+          <a:ext cx="0" cy="0"/>
+          <a:chOff x="0" y="0"/>
+          <a:chExt cx="0" cy="0"/>
+        </a:xfrm>
+      </p:grpSpPr>
+      <p:sp>
+        <p:nvSpPr>
+          <p:cNvPr id="3" name="Subtitle 2">
+            <a:extLst>
+              <a:ext uri="{FF2B5EF4-FFF2-40B4-BE49-F238E27FC236}">
+                <a16:creationId xmlns:a16="http://schemas.microsoft.com/office/drawing/2014/main" id="{40D62168-352F-3E0A-2BF8-7343F6BB4D99}"/>
+              </a:ext>
+            </a:extLst>
+          </p:cNvPr>
+          <p:cNvSpPr>
+            <a:spLocks noGrp="1"/>
+          </p:cNvSpPr>
+          <p:nvPr>
+            <p:ph type="subTitle" idx="1"/>
+          </p:nvPr>
+        </p:nvSpPr>
+        <p:spPr>
+          <a:xfrm>
+            <a:off x="84221" y="213360"/>
+            <a:ext cx="8891337" cy="6416040"/>
+          </a:xfrm>
+        </p:spPr>
+        <p:txBody>
+          <a:bodyPr>
+            <a:noAutofit/>
+          </a:bodyPr>
+          <a:lstStyle/>
+          <a:p>
+            <a:pPr algn="l"/>
+            <a:r>
+              <a:rPr lang="en-US" sz="6600" dirty="0">
+                <a:solidFill>
+                  <a:schemeClr val="bg1"/>
+                </a:solidFill>
+                <a:latin typeface="Avenir Medium" panose="02000503020000020003" pitchFamily="2" charset="0"/>
+                <a:ea typeface="Bodoni Ornaments" pitchFamily="2" charset="0"/>
+              </a:rPr>
+              <a:t>Amazing Grace</a:t>
+            </a:r>
+          </a:p>
+        </p:txBody>
+      </p:sp>
+    </p:spTree>
+    <p:extLst>
+      <p:ext uri="{BB962C8B-B14F-4D97-AF65-F5344CB8AC3E}">
+        <p14:creationId xmlns:p14="http://schemas.microsoft.com/office/powerpoint/2010/main" val="1331783051"/>
+      </p:ext>
+    </p:extLst>
+  </p:cSld>
+  <p:clrMapOvr>
+    <a:masterClrMapping/>
+  </p:clrMapOvr>
+</p:sld>
+</file>
+
+<file path=ppt/slides/slide49.xml><?xml version="1.0" encoding="utf-8"?>
 <p:sld xmlns:a="http://schemas.openxmlformats.org/drawingml/2006/main" xmlns:r="http://schemas.openxmlformats.org/officeDocument/2006/relationships" xmlns:p="http://schemas.openxmlformats.org/presentationml/2006/main">
   <p:cSld>
     <p:bg>
@@ -8637,130 +8682,6 @@
     <p:extLst>
       <p:ext uri="{BB962C8B-B14F-4D97-AF65-F5344CB8AC3E}">
         <p14:creationId xmlns:p14="http://schemas.microsoft.com/office/powerpoint/2010/main" val="3420723518"/>
-      </p:ext>
-    </p:extLst>
-  </p:cSld>
-  <p:clrMapOvr>
-    <a:masterClrMapping/>
-  </p:clrMapOvr>
-</p:sld>
-</file>
-
-<file path=ppt/slides/slide49.xml><?xml version="1.0" encoding="utf-8"?>
-<p:sld xmlns:a="http://schemas.openxmlformats.org/drawingml/2006/main" xmlns:r="http://schemas.openxmlformats.org/officeDocument/2006/relationships" xmlns:p="http://schemas.openxmlformats.org/presentationml/2006/main">
-  <p:cSld>
-    <p:bg>
-      <p:bgPr>
-        <a:solidFill>
-          <a:schemeClr val="tx1"/>
-        </a:solidFill>
-        <a:effectLst/>
-      </p:bgPr>
-    </p:bg>
-    <p:spTree>
-      <p:nvGrpSpPr>
-        <p:cNvPr id="1" name="">
-          <a:extLst>
-            <a:ext uri="{FF2B5EF4-FFF2-40B4-BE49-F238E27FC236}">
-              <a16:creationId xmlns:a16="http://schemas.microsoft.com/office/drawing/2014/main" id="{46C39DE4-B05E-117C-AB0E-3A3481DEA43D}"/>
-            </a:ext>
-          </a:extLst>
-        </p:cNvPr>
-        <p:cNvGrpSpPr/>
-        <p:nvPr/>
-      </p:nvGrpSpPr>
-      <p:grpSpPr>
-        <a:xfrm>
-          <a:off x="0" y="0"/>
-          <a:ext cx="0" cy="0"/>
-          <a:chOff x="0" y="0"/>
-          <a:chExt cx="0" cy="0"/>
-        </a:xfrm>
-      </p:grpSpPr>
-      <p:sp>
-        <p:nvSpPr>
-          <p:cNvPr id="3" name="Subtitle 2">
-            <a:extLst>
-              <a:ext uri="{FF2B5EF4-FFF2-40B4-BE49-F238E27FC236}">
-                <a16:creationId xmlns:a16="http://schemas.microsoft.com/office/drawing/2014/main" id="{FE4B78B5-F6A5-2FE9-6ED1-4BB0964E143D}"/>
-              </a:ext>
-            </a:extLst>
-          </p:cNvPr>
-          <p:cNvSpPr>
-            <a:spLocks noGrp="1"/>
-          </p:cNvSpPr>
-          <p:nvPr>
-            <p:ph type="subTitle" idx="1"/>
-          </p:nvPr>
-        </p:nvSpPr>
-        <p:spPr>
-          <a:xfrm>
-            <a:off x="84221" y="213360"/>
-            <a:ext cx="8891337" cy="6416040"/>
-          </a:xfrm>
-        </p:spPr>
-        <p:txBody>
-          <a:bodyPr>
-            <a:noAutofit/>
-          </a:bodyPr>
-          <a:lstStyle/>
-          <a:p>
-            <a:endParaRPr lang="en-US" sz="4400" dirty="0">
-              <a:solidFill>
-                <a:schemeClr val="bg1"/>
-              </a:solidFill>
-              <a:latin typeface="Avenir Medium" panose="02000503020000020003" pitchFamily="2" charset="0"/>
-              <a:ea typeface="Bodoni Ornaments" pitchFamily="2" charset="0"/>
-            </a:endParaRPr>
-          </a:p>
-          <a:p>
-            <a:endParaRPr lang="en-US" sz="4400" dirty="0">
-              <a:solidFill>
-                <a:schemeClr val="bg1"/>
-              </a:solidFill>
-              <a:latin typeface="Avenir Medium" panose="02000503020000020003" pitchFamily="2" charset="0"/>
-              <a:ea typeface="Bodoni Ornaments" pitchFamily="2" charset="0"/>
-            </a:endParaRPr>
-          </a:p>
-          <a:p>
-            <a:r>
-              <a:rPr lang="en-US" sz="4400" dirty="0">
-                <a:solidFill>
-                  <a:schemeClr val="bg1"/>
-                </a:solidFill>
-                <a:latin typeface="Avenir Medium" panose="02000503020000020003" pitchFamily="2" charset="0"/>
-                <a:ea typeface="Bodoni Ornaments" pitchFamily="2" charset="0"/>
-              </a:rPr>
-              <a:t>I once was lost but now am found</a:t>
-            </a:r>
-          </a:p>
-          <a:p>
-            <a:r>
-              <a:rPr lang="en-US" sz="4400" dirty="0">
-                <a:solidFill>
-                  <a:schemeClr val="bg1"/>
-                </a:solidFill>
-                <a:latin typeface="Avenir Medium" panose="02000503020000020003" pitchFamily="2" charset="0"/>
-                <a:ea typeface="Bodoni Ornaments" pitchFamily="2" charset="0"/>
-              </a:rPr>
-              <a:t>Was blind but now I see</a:t>
-            </a:r>
-          </a:p>
-          <a:p>
-            <a:endParaRPr lang="en-US" sz="4400" dirty="0">
-              <a:solidFill>
-                <a:schemeClr val="bg1"/>
-              </a:solidFill>
-              <a:latin typeface="Avenir Medium" panose="02000503020000020003" pitchFamily="2" charset="0"/>
-              <a:ea typeface="Bodoni Ornaments" pitchFamily="2" charset="0"/>
-            </a:endParaRPr>
-          </a:p>
-        </p:txBody>
-      </p:sp>
-    </p:spTree>
-    <p:extLst>
-      <p:ext uri="{BB962C8B-B14F-4D97-AF65-F5344CB8AC3E}">
-        <p14:creationId xmlns:p14="http://schemas.microsoft.com/office/powerpoint/2010/main" val="3544644455"/>
       </p:ext>
     </p:extLst>
   </p:cSld>
@@ -8934,6 +8855,130 @@
         <p:cNvPr id="1" name="">
           <a:extLst>
             <a:ext uri="{FF2B5EF4-FFF2-40B4-BE49-F238E27FC236}">
+              <a16:creationId xmlns:a16="http://schemas.microsoft.com/office/drawing/2014/main" id="{46C39DE4-B05E-117C-AB0E-3A3481DEA43D}"/>
+            </a:ext>
+          </a:extLst>
+        </p:cNvPr>
+        <p:cNvGrpSpPr/>
+        <p:nvPr/>
+      </p:nvGrpSpPr>
+      <p:grpSpPr>
+        <a:xfrm>
+          <a:off x="0" y="0"/>
+          <a:ext cx="0" cy="0"/>
+          <a:chOff x="0" y="0"/>
+          <a:chExt cx="0" cy="0"/>
+        </a:xfrm>
+      </p:grpSpPr>
+      <p:sp>
+        <p:nvSpPr>
+          <p:cNvPr id="3" name="Subtitle 2">
+            <a:extLst>
+              <a:ext uri="{FF2B5EF4-FFF2-40B4-BE49-F238E27FC236}">
+                <a16:creationId xmlns:a16="http://schemas.microsoft.com/office/drawing/2014/main" id="{FE4B78B5-F6A5-2FE9-6ED1-4BB0964E143D}"/>
+              </a:ext>
+            </a:extLst>
+          </p:cNvPr>
+          <p:cNvSpPr>
+            <a:spLocks noGrp="1"/>
+          </p:cNvSpPr>
+          <p:nvPr>
+            <p:ph type="subTitle" idx="1"/>
+          </p:nvPr>
+        </p:nvSpPr>
+        <p:spPr>
+          <a:xfrm>
+            <a:off x="84221" y="213360"/>
+            <a:ext cx="8891337" cy="6416040"/>
+          </a:xfrm>
+        </p:spPr>
+        <p:txBody>
+          <a:bodyPr>
+            <a:noAutofit/>
+          </a:bodyPr>
+          <a:lstStyle/>
+          <a:p>
+            <a:endParaRPr lang="en-US" sz="4400" dirty="0">
+              <a:solidFill>
+                <a:schemeClr val="bg1"/>
+              </a:solidFill>
+              <a:latin typeface="Avenir Medium" panose="02000503020000020003" pitchFamily="2" charset="0"/>
+              <a:ea typeface="Bodoni Ornaments" pitchFamily="2" charset="0"/>
+            </a:endParaRPr>
+          </a:p>
+          <a:p>
+            <a:endParaRPr lang="en-US" sz="4400" dirty="0">
+              <a:solidFill>
+                <a:schemeClr val="bg1"/>
+              </a:solidFill>
+              <a:latin typeface="Avenir Medium" panose="02000503020000020003" pitchFamily="2" charset="0"/>
+              <a:ea typeface="Bodoni Ornaments" pitchFamily="2" charset="0"/>
+            </a:endParaRPr>
+          </a:p>
+          <a:p>
+            <a:r>
+              <a:rPr lang="en-US" sz="4400" dirty="0">
+                <a:solidFill>
+                  <a:schemeClr val="bg1"/>
+                </a:solidFill>
+                <a:latin typeface="Avenir Medium" panose="02000503020000020003" pitchFamily="2" charset="0"/>
+                <a:ea typeface="Bodoni Ornaments" pitchFamily="2" charset="0"/>
+              </a:rPr>
+              <a:t>I once was lost but now am found</a:t>
+            </a:r>
+          </a:p>
+          <a:p>
+            <a:r>
+              <a:rPr lang="en-US" sz="4400" dirty="0">
+                <a:solidFill>
+                  <a:schemeClr val="bg1"/>
+                </a:solidFill>
+                <a:latin typeface="Avenir Medium" panose="02000503020000020003" pitchFamily="2" charset="0"/>
+                <a:ea typeface="Bodoni Ornaments" pitchFamily="2" charset="0"/>
+              </a:rPr>
+              <a:t>Was blind but now I see</a:t>
+            </a:r>
+          </a:p>
+          <a:p>
+            <a:endParaRPr lang="en-US" sz="4400" dirty="0">
+              <a:solidFill>
+                <a:schemeClr val="bg1"/>
+              </a:solidFill>
+              <a:latin typeface="Avenir Medium" panose="02000503020000020003" pitchFamily="2" charset="0"/>
+              <a:ea typeface="Bodoni Ornaments" pitchFamily="2" charset="0"/>
+            </a:endParaRPr>
+          </a:p>
+        </p:txBody>
+      </p:sp>
+    </p:spTree>
+    <p:extLst>
+      <p:ext uri="{BB962C8B-B14F-4D97-AF65-F5344CB8AC3E}">
+        <p14:creationId xmlns:p14="http://schemas.microsoft.com/office/powerpoint/2010/main" val="3544644455"/>
+      </p:ext>
+    </p:extLst>
+  </p:cSld>
+  <p:clrMapOvr>
+    <a:masterClrMapping/>
+  </p:clrMapOvr>
+</p:sld>
+</file>
+
+<file path=ppt/slides/slide51.xml><?xml version="1.0" encoding="utf-8"?>
+<p:sld xmlns:a="http://schemas.openxmlformats.org/drawingml/2006/main" xmlns:r="http://schemas.openxmlformats.org/officeDocument/2006/relationships" xmlns:p="http://schemas.openxmlformats.org/presentationml/2006/main">
+  <p:cSld>
+    <p:bg>
+      <p:bgPr>
+        <a:solidFill>
+          <a:schemeClr val="tx1"/>
+        </a:solidFill>
+        <a:effectLst/>
+      </p:bgPr>
+    </p:bg>
+    <p:spTree>
+      <p:nvGrpSpPr>
+        <p:cNvPr id="1" name="">
+          <a:extLst>
+            <a:ext uri="{FF2B5EF4-FFF2-40B4-BE49-F238E27FC236}">
               <a16:creationId xmlns:a16="http://schemas.microsoft.com/office/drawing/2014/main" id="{35BFBF6E-A800-A557-4607-B211D092B56C}"/>
             </a:ext>
           </a:extLst>
@@ -9073,7 +9118,7 @@
 </p:sld>
 </file>
 
-<file path=ppt/slides/slide51.xml><?xml version="1.0" encoding="utf-8"?>
+<file path=ppt/slides/slide52.xml><?xml version="1.0" encoding="utf-8"?>
 <p:sld xmlns:a="http://schemas.openxmlformats.org/drawingml/2006/main" xmlns:r="http://schemas.openxmlformats.org/officeDocument/2006/relationships" xmlns:p="http://schemas.openxmlformats.org/presentationml/2006/main">
   <p:cSld>
     <p:bg>
@@ -9188,7 +9233,7 @@
 </p:sld>
 </file>
 
-<file path=ppt/slides/slide52.xml><?xml version="1.0" encoding="utf-8"?>
+<file path=ppt/slides/slide53.xml><?xml version="1.0" encoding="utf-8"?>
 <p:sld xmlns:a="http://schemas.openxmlformats.org/drawingml/2006/main" xmlns:r="http://schemas.openxmlformats.org/officeDocument/2006/relationships" xmlns:p="http://schemas.openxmlformats.org/presentationml/2006/main">
   <p:cSld>
     <p:bg>
@@ -9324,7 +9369,7 @@
 </p:sld>
 </file>
 
-<file path=ppt/slides/slide53.xml><?xml version="1.0" encoding="utf-8"?>
+<file path=ppt/slides/slide54.xml><?xml version="1.0" encoding="utf-8"?>
 <p:sld xmlns:a="http://schemas.openxmlformats.org/drawingml/2006/main" xmlns:r="http://schemas.openxmlformats.org/officeDocument/2006/relationships" xmlns:p="http://schemas.openxmlformats.org/presentationml/2006/main">
   <p:cSld>
     <p:bg>
@@ -9451,7 +9496,7 @@
 </p:sld>
 </file>
 
-<file path=ppt/slides/slide54.xml><?xml version="1.0" encoding="utf-8"?>
+<file path=ppt/slides/slide55.xml><?xml version="1.0" encoding="utf-8"?>
 <p:sld xmlns:a="http://schemas.openxmlformats.org/drawingml/2006/main" xmlns:r="http://schemas.openxmlformats.org/officeDocument/2006/relationships" xmlns:p="http://schemas.openxmlformats.org/presentationml/2006/main">
   <p:cSld>
     <p:bg>
@@ -9587,7 +9632,7 @@
 </p:sld>
 </file>
 
-<file path=ppt/slides/slide55.xml><?xml version="1.0" encoding="utf-8"?>
+<file path=ppt/slides/slide56.xml><?xml version="1.0" encoding="utf-8"?>
 <p:sld xmlns:a="http://schemas.openxmlformats.org/drawingml/2006/main" xmlns:r="http://schemas.openxmlformats.org/officeDocument/2006/relationships" xmlns:p="http://schemas.openxmlformats.org/presentationml/2006/main">
   <p:cSld>
     <p:bg>
